--- a/dist/초2/국어/대화와매체/초2_국어_대화와매체_02_글과그림에서정보찾기_학생용.pptx
+++ b/dist/초2/국어/대화와매체/초2_국어_대화와매체_02_글과그림에서정보찾기_학생용.pptx
@@ -119,13 +119,13 @@
   <p:extLst>
     <p:ext uri="{521415D9-36F7-43E2-AB2F-B90AF26B5E84}">
       <p14:sectionLst xmlns:p14="http://schemas.microsoft.com/office/powerpoint/2010/main">
-        <p14:section name="도입" id="{2cfa3fb1-3004-418e-70ec-4541a0c08b0b}">
+        <p14:section name="도입" id="{d518c1b8-8d07-cd38-068a-a3995ee7fc1e}">
           <p14:sldIdLst>
             <p14:sldId id="256"/>
             <p14:sldId id="257"/>
           </p14:sldIdLst>
         </p14:section>
-        <p14:section name="개념" id="{420721ac-4360-46bf-e3ac-458a69875c4a}">
+        <p14:section name="개념" id="{38af97bd-eb62-f53f-c026-76c63a163ecc}">
           <p14:sldIdLst>
             <p14:sldId id="258"/>
             <p14:sldId id="259"/>
@@ -133,25 +133,25 @@
             <p14:sldId id="261"/>
           </p14:sldIdLst>
         </p14:section>
-        <p14:section name="연습" id="{622e4c70-7d16-4f9e-6b36-7afa3b2707f1}">
+        <p14:section name="연습" id="{48b9c5ed-61c4-23dd-a7c3-a09c6a20ed1f}">
           <p14:sldIdLst>
             <p14:sldId id="262"/>
             <p14:sldId id="263"/>
             <p14:sldId id="264"/>
           </p14:sldIdLst>
         </p14:section>
-        <p14:section name="확인" id="{81e49e0f-35ba-30de-e6b6-42df6a6198f9}">
+        <p14:section name="확인" id="{b714c9cd-8760-a05a-fac8-c96bac579f73}">
           <p14:sldIdLst>
             <p14:sldId id="265"/>
             <p14:sldId id="266"/>
           </p14:sldIdLst>
         </p14:section>
-        <p14:section name="정리" id="{aaacd73f-856b-f177-6089-55d798b105ba}">
+        <p14:section name="정리" id="{e188f54e-b54f-8a63-0f4c-04563974c2f6}">
           <p14:sldIdLst>
             <p14:sldId id="267"/>
           </p14:sldIdLst>
         </p14:section>
-        <p14:section name="보충" id="{0364571e-44f2-016e-64f6-d66daacb2b99}">
+        <p14:section name="보충" id="{ee4b9cb5-e61d-2c33-370f-6f02c8a11514}">
           <p14:sldIdLst>
             <p14:sldId id="268"/>
           </p14:sldIdLst>
@@ -3030,7 +3030,7 @@
           </p:nvPr>
         </p:nvGraphicFramePr>
         <p:xfrm>
-          <a:off x="1522476" y="1412240"/>
+          <a:off x="1522476" y="1343660"/>
           <a:ext cx="9144000" cy="914400"/>
         </p:xfrm>
         <a:graphic>
@@ -3041,7 +3041,7 @@
                 <a:gridCol w="2377440"/>
                 <a:gridCol w="6766560"/>
               </a:tblGrid>
-              <a:tr h="528320">
+              <a:tr h="551180">
                 <a:tc>
                   <a:txBody>
                     <a:bodyPr/>
@@ -3051,7 +3051,7 @@
                         <a:buNone/>
                       </a:pPr>
                       <a:r>
-                        <a:rPr lang="en-US" sz="2600" b="1" dirty="0">
+                        <a:rPr lang="en-US" sz="2800" b="1" dirty="0">
                           <a:solidFill>
                             <a:srgbClr val="1F2937"/>
                           </a:solidFill>
@@ -3061,7 +3061,7 @@
                         </a:rPr>
                         <a:t>무엇을</a:t>
                       </a:r>
-                      <a:endParaRPr lang="en-US" sz="2600" dirty="0">
+                      <a:endParaRPr lang="en-US" sz="2800" dirty="0">
                         <a:latin typeface="맑은 고딕" charset="0"/>
                         <a:ea typeface="맑은 고딕" charset="0"/>
                         <a:cs typeface="맑은 고딕" charset="0"/>
@@ -3119,7 +3119,7 @@
                         <a:buNone/>
                       </a:pPr>
                       <a:r>
-                        <a:rPr lang="en-US" sz="2600" dirty="0">
+                        <a:rPr lang="en-US" sz="2800" dirty="0">
                           <a:solidFill>
                             <a:srgbClr val="1F2937"/>
                           </a:solidFill>
@@ -3129,7 +3129,7 @@
                         </a:rPr>
                         <a:t>숲에서 나뭇잎 찾기 놀이</a:t>
                       </a:r>
-                      <a:endParaRPr lang="en-US" sz="2600" dirty="0">
+                      <a:endParaRPr lang="en-US" sz="2800" dirty="0">
                         <a:latin typeface="맑은 고딕" charset="0"/>
                         <a:ea typeface="맑은 고딕" charset="0"/>
                         <a:cs typeface="맑은 고딕" charset="0"/>
@@ -3179,7 +3179,7 @@
                   </a:tcPr>
                 </a:tc>
               </a:tr>
-              <a:tr h="528320">
+              <a:tr h="551180">
                 <a:tc>
                   <a:txBody>
                     <a:bodyPr/>
@@ -3189,7 +3189,7 @@
                         <a:buNone/>
                       </a:pPr>
                       <a:r>
-                        <a:rPr lang="en-US" sz="2600" b="1" dirty="0">
+                        <a:rPr lang="en-US" sz="2800" b="1" dirty="0">
                           <a:solidFill>
                             <a:srgbClr val="1F2937"/>
                           </a:solidFill>
@@ -3199,7 +3199,7 @@
                         </a:rPr>
                         <a:t>언제</a:t>
                       </a:r>
-                      <a:endParaRPr lang="en-US" sz="2600" dirty="0">
+                      <a:endParaRPr lang="en-US" sz="2800" dirty="0">
                         <a:latin typeface="맑은 고딕" charset="0"/>
                         <a:ea typeface="맑은 고딕" charset="0"/>
                         <a:cs typeface="맑은 고딕" charset="0"/>
@@ -3257,7 +3257,7 @@
                         <a:buNone/>
                       </a:pPr>
                       <a:r>
-                        <a:rPr lang="en-US" sz="2600" dirty="0">
+                        <a:rPr lang="en-US" sz="2800" dirty="0">
                           <a:solidFill>
                             <a:srgbClr val="1F2937"/>
                           </a:solidFill>
@@ -3267,7 +3267,7 @@
                         </a:rPr>
                         <a:t>10월 17일 토요일 오전 9시~11시</a:t>
                       </a:r>
-                      <a:endParaRPr lang="en-US" sz="2600" dirty="0">
+                      <a:endParaRPr lang="en-US" sz="2800" dirty="0">
                         <a:latin typeface="맑은 고딕" charset="0"/>
                         <a:ea typeface="맑은 고딕" charset="0"/>
                         <a:cs typeface="맑은 고딕" charset="0"/>
@@ -3317,7 +3317,7 @@
                   </a:tcPr>
                 </a:tc>
               </a:tr>
-              <a:tr h="528320">
+              <a:tr h="551180">
                 <a:tc>
                   <a:txBody>
                     <a:bodyPr/>
@@ -3327,7 +3327,7 @@
                         <a:buNone/>
                       </a:pPr>
                       <a:r>
-                        <a:rPr lang="en-US" sz="2600" b="1" dirty="0">
+                        <a:rPr lang="en-US" sz="2800" b="1" dirty="0">
                           <a:solidFill>
                             <a:srgbClr val="1F2937"/>
                           </a:solidFill>
@@ -3337,7 +3337,7 @@
                         </a:rPr>
                         <a:t>어디서</a:t>
                       </a:r>
-                      <a:endParaRPr lang="en-US" sz="2600" dirty="0">
+                      <a:endParaRPr lang="en-US" sz="2800" dirty="0">
                         <a:latin typeface="맑은 고딕" charset="0"/>
                         <a:ea typeface="맑은 고딕" charset="0"/>
                         <a:cs typeface="맑은 고딕" charset="0"/>
@@ -3395,7 +3395,7 @@
                         <a:buNone/>
                       </a:pPr>
                       <a:r>
-                        <a:rPr lang="en-US" sz="2600" dirty="0">
+                        <a:rPr lang="en-US" sz="2800" dirty="0">
                           <a:solidFill>
                             <a:srgbClr val="1F2937"/>
                           </a:solidFill>
@@ -3405,7 +3405,7 @@
                         </a:rPr>
                         <a:t>푸른 숲 공원 정문</a:t>
                       </a:r>
-                      <a:endParaRPr lang="en-US" sz="2600" dirty="0">
+                      <a:endParaRPr lang="en-US" sz="2800" dirty="0">
                         <a:latin typeface="맑은 고딕" charset="0"/>
                         <a:ea typeface="맑은 고딕" charset="0"/>
                         <a:cs typeface="맑은 고딕" charset="0"/>
@@ -3455,7 +3455,7 @@
                   </a:tcPr>
                 </a:tc>
               </a:tr>
-              <a:tr h="528320">
+              <a:tr h="551180">
                 <a:tc>
                   <a:txBody>
                     <a:bodyPr/>
@@ -3465,7 +3465,7 @@
                         <a:buNone/>
                       </a:pPr>
                       <a:r>
-                        <a:rPr lang="en-US" sz="2600" b="1" dirty="0">
+                        <a:rPr lang="en-US" sz="2800" b="1" dirty="0">
                           <a:solidFill>
                             <a:srgbClr val="1F2937"/>
                           </a:solidFill>
@@ -3475,7 +3475,7 @@
                         </a:rPr>
                         <a:t>누가</a:t>
                       </a:r>
-                      <a:endParaRPr lang="en-US" sz="2600" dirty="0">
+                      <a:endParaRPr lang="en-US" sz="2800" dirty="0">
                         <a:latin typeface="맑은 고딕" charset="0"/>
                         <a:ea typeface="맑은 고딕" charset="0"/>
                         <a:cs typeface="맑은 고딕" charset="0"/>
@@ -3533,7 +3533,7 @@
                         <a:buNone/>
                       </a:pPr>
                       <a:r>
-                        <a:rPr lang="en-US" sz="2600" dirty="0">
+                        <a:rPr lang="en-US" sz="2800" dirty="0">
                           <a:solidFill>
                             <a:srgbClr val="1F2937"/>
                           </a:solidFill>
@@ -3543,7 +3543,7 @@
                         </a:rPr>
                         <a:t>1~3학년 어린이</a:t>
                       </a:r>
-                      <a:endParaRPr lang="en-US" sz="2600" dirty="0">
+                      <a:endParaRPr lang="en-US" sz="2800" dirty="0">
                         <a:latin typeface="맑은 고딕" charset="0"/>
                         <a:ea typeface="맑은 고딕" charset="0"/>
                         <a:cs typeface="맑은 고딕" charset="0"/>
@@ -3593,7 +3593,7 @@
                   </a:tcPr>
                 </a:tc>
               </a:tr>
-              <a:tr h="528320">
+              <a:tr h="551180">
                 <a:tc>
                   <a:txBody>
                     <a:bodyPr/>
@@ -3603,7 +3603,7 @@
                         <a:buNone/>
                       </a:pPr>
                       <a:r>
-                        <a:rPr lang="en-US" sz="2600" b="1" dirty="0">
+                        <a:rPr lang="en-US" sz="2800" b="1" dirty="0">
                           <a:solidFill>
                             <a:srgbClr val="1F2937"/>
                           </a:solidFill>
@@ -3613,7 +3613,7 @@
                         </a:rPr>
                         <a:t>준비물</a:t>
                       </a:r>
-                      <a:endParaRPr lang="en-US" sz="2600" dirty="0">
+                      <a:endParaRPr lang="en-US" sz="2800" dirty="0">
                         <a:latin typeface="맑은 고딕" charset="0"/>
                         <a:ea typeface="맑은 고딕" charset="0"/>
                         <a:cs typeface="맑은 고딕" charset="0"/>
@@ -3671,7 +3671,7 @@
                         <a:buNone/>
                       </a:pPr>
                       <a:r>
-                        <a:rPr lang="en-US" sz="2600" dirty="0">
+                        <a:rPr lang="en-US" sz="2800" dirty="0">
                           <a:solidFill>
                             <a:srgbClr val="1F2937"/>
                           </a:solidFill>
@@ -3681,7 +3681,7 @@
                         </a:rPr>
                         <a:t>모자, 물병, 운동화</a:t>
                       </a:r>
-                      <a:endParaRPr lang="en-US" sz="2600" dirty="0">
+                      <a:endParaRPr lang="en-US" sz="2800" dirty="0">
                         <a:latin typeface="맑은 고딕" charset="0"/>
                         <a:ea typeface="맑은 고딕" charset="0"/>
                         <a:cs typeface="맑은 고딕" charset="0"/>
@@ -3731,7 +3731,7 @@
                   </a:tcPr>
                 </a:tc>
               </a:tr>
-              <a:tr h="528320">
+              <a:tr h="551180">
                 <a:tc>
                   <a:txBody>
                     <a:bodyPr/>
@@ -3741,7 +3741,7 @@
                         <a:buNone/>
                       </a:pPr>
                       <a:r>
-                        <a:rPr lang="en-US" sz="2600" b="1" dirty="0">
+                        <a:rPr lang="en-US" sz="2800" b="1" dirty="0">
                           <a:solidFill>
                             <a:srgbClr val="1F2937"/>
                           </a:solidFill>
@@ -3751,7 +3751,7 @@
                         </a:rPr>
                         <a:t>비가 오면</a:t>
                       </a:r>
-                      <a:endParaRPr lang="en-US" sz="2600" dirty="0">
+                      <a:endParaRPr lang="en-US" sz="2800" dirty="0">
                         <a:latin typeface="맑은 고딕" charset="0"/>
                         <a:ea typeface="맑은 고딕" charset="0"/>
                         <a:cs typeface="맑은 고딕" charset="0"/>
@@ -3809,7 +3809,7 @@
                         <a:buNone/>
                       </a:pPr>
                       <a:r>
-                        <a:rPr lang="en-US" sz="2600" dirty="0">
+                        <a:rPr lang="en-US" sz="2800" dirty="0">
                           <a:solidFill>
                             <a:srgbClr val="1F2937"/>
                           </a:solidFill>
@@ -3819,7 +3819,7 @@
                         </a:rPr>
                         <a:t>10월 24일 토요일로 미뤄요</a:t>
                       </a:r>
-                      <a:endParaRPr lang="en-US" sz="2600" dirty="0">
+                      <a:endParaRPr lang="en-US" sz="2800" dirty="0">
                         <a:latin typeface="맑은 고딕" charset="0"/>
                         <a:ea typeface="맑은 고딕" charset="0"/>
                         <a:cs typeface="맑은 고딕" charset="0"/>
@@ -5326,7 +5326,7 @@
           </p:nvPr>
         </p:nvGraphicFramePr>
         <p:xfrm>
-          <a:off x="6855714" y="3512820"/>
+          <a:off x="6855714" y="3539490"/>
           <a:ext cx="4206240" cy="914400"/>
         </p:xfrm>
         <a:graphic>
@@ -5337,7 +5337,7 @@
                 <a:gridCol w="2103120"/>
                 <a:gridCol w="2103120"/>
               </a:tblGrid>
-              <a:tr h="568960">
+              <a:tr h="551180">
                 <a:tc>
                   <a:txBody>
                     <a:bodyPr/>
@@ -5475,7 +5475,7 @@
                   </a:tcPr>
                 </a:tc>
               </a:tr>
-              <a:tr h="568960">
+              <a:tr h="551180">
                 <a:tc>
                   <a:txBody>
                     <a:bodyPr/>
@@ -5613,7 +5613,7 @@
                   </a:tcPr>
                 </a:tc>
               </a:tr>
-              <a:tr h="568960">
+              <a:tr h="551180">
                 <a:tc>
                   <a:txBody>
                     <a:bodyPr/>
@@ -7200,7 +7200,7 @@
           </p:nvPr>
         </p:nvGraphicFramePr>
         <p:xfrm>
-          <a:off x="1522476" y="1800860"/>
+          <a:off x="1522476" y="1845310"/>
           <a:ext cx="9144000" cy="914400"/>
         </p:xfrm>
         <a:graphic>
@@ -7211,7 +7211,7 @@
                 <a:gridCol w="2377440"/>
                 <a:gridCol w="6766560"/>
               </a:tblGrid>
-              <a:tr h="568960">
+              <a:tr h="551180">
                 <a:tc>
                   <a:txBody>
                     <a:bodyPr/>
@@ -7349,7 +7349,7 @@
                   </a:tcPr>
                 </a:tc>
               </a:tr>
-              <a:tr h="568960">
+              <a:tr h="551180">
                 <a:tc>
                   <a:txBody>
                     <a:bodyPr/>
@@ -7487,7 +7487,7 @@
                   </a:tcPr>
                 </a:tc>
               </a:tr>
-              <a:tr h="568960">
+              <a:tr h="551180">
                 <a:tc>
                   <a:txBody>
                     <a:bodyPr/>
@@ -7625,7 +7625,7 @@
                   </a:tcPr>
                 </a:tc>
               </a:tr>
-              <a:tr h="568960">
+              <a:tr h="551180">
                 <a:tc>
                   <a:txBody>
                     <a:bodyPr/>
@@ -7763,7 +7763,7 @@
                   </a:tcPr>
                 </a:tc>
               </a:tr>
-              <a:tr h="568960">
+              <a:tr h="551180">
                 <a:tc>
                   <a:txBody>
                     <a:bodyPr/>
@@ -9015,7 +9015,7 @@
           </p:nvPr>
         </p:nvGraphicFramePr>
         <p:xfrm>
-          <a:off x="1522476" y="1516380"/>
+          <a:off x="1522476" y="1569720"/>
           <a:ext cx="9144000" cy="914400"/>
         </p:xfrm>
         <a:graphic>
@@ -9026,7 +9026,7 @@
                 <a:gridCol w="2377440"/>
                 <a:gridCol w="6766560"/>
               </a:tblGrid>
-              <a:tr h="568960">
+              <a:tr h="551180">
                 <a:tc>
                   <a:txBody>
                     <a:bodyPr/>
@@ -9164,7 +9164,7 @@
                   </a:tcPr>
                 </a:tc>
               </a:tr>
-              <a:tr h="568960">
+              <a:tr h="551180">
                 <a:tc>
                   <a:txBody>
                     <a:bodyPr/>
@@ -9302,7 +9302,7 @@
                   </a:tcPr>
                 </a:tc>
               </a:tr>
-              <a:tr h="568960">
+              <a:tr h="551180">
                 <a:tc>
                   <a:txBody>
                     <a:bodyPr/>
@@ -9440,7 +9440,7 @@
                   </a:tcPr>
                 </a:tc>
               </a:tr>
-              <a:tr h="568960">
+              <a:tr h="551180">
                 <a:tc>
                   <a:txBody>
                     <a:bodyPr/>
@@ -9578,7 +9578,7 @@
                   </a:tcPr>
                 </a:tc>
               </a:tr>
-              <a:tr h="568960">
+              <a:tr h="551180">
                 <a:tc>
                   <a:txBody>
                     <a:bodyPr/>
@@ -9716,7 +9716,7 @@
                   </a:tcPr>
                 </a:tc>
               </a:tr>
-              <a:tr h="568960">
+              <a:tr h="551180">
                 <a:tc>
                   <a:txBody>
                     <a:bodyPr/>
